--- a/PPTs/20261030_L6.pptx
+++ b/PPTs/20261030_L6.pptx
@@ -132,21 +132,21 @@
   <p:extLst>
     <p:ext uri="{521415D9-36F7-43E2-AB2F-B90AF26B5E84}">
       <p14:sectionLst xmlns:p14="http://schemas.microsoft.com/office/powerpoint/2010/main">
-        <p14:section name="Intro" id="{80a010b3-258f-8cb9-c0b8-6537cbce5c5e}">
+        <p14:section name="Intro" id="{52aec715-59e0-7cbf-924c-d2047fe0537c}">
           <p14:sldIdLst>
             <p14:sldId id="256"/>
             <p14:sldId id="257"/>
             <p14:sldId id="258"/>
           </p14:sldIdLst>
         </p14:section>
-        <p14:section name="Files" id="{c939bf41-e04a-ac26-5274-c8ba8c68f556}">
+        <p14:section name="Files" id="{484c23c3-aaab-4b67-8b44-51e80b6b8fcd}">
           <p14:sldIdLst>
             <p14:sldId id="259"/>
             <p14:sldId id="260"/>
             <p14:sldId id="261"/>
           </p14:sldIdLst>
         </p14:section>
-        <p14:section name="Build" id="{0a8f72c8-4585-851a-e259-a1ca49a6cc1a}">
+        <p14:section name="Build" id="{2d3cd61c-772b-d6ea-4b1a-5a42505b8794}">
           <p14:sldIdLst>
             <p14:sldId id="262"/>
             <p14:sldId id="263"/>
@@ -156,7 +156,7 @@
             <p14:sldId id="267"/>
           </p14:sldIdLst>
         </p14:section>
-        <p14:section name="State" id="{510b9dad-7e65-7a86-ac3b-bc9ed5499abc}">
+        <p14:section name="State" id="{e14e652a-1173-09cb-af56-c71b793aa1f3}">
           <p14:sldIdLst>
             <p14:sldId id="268"/>
             <p14:sldId id="269"/>
@@ -166,20 +166,20 @@
             <p14:sldId id="273"/>
           </p14:sldIdLst>
         </p14:section>
-        <p14:section name="Debug" id="{f0ad6930-99a2-cbff-e51e-ba868099146a}">
+        <p14:section name="Debug" id="{62a48ee4-b37b-66f3-a5fd-308befd88b1b}">
           <p14:sldIdLst>
             <p14:sldId id="274"/>
             <p14:sldId id="275"/>
           </p14:sldIdLst>
         </p14:section>
-        <p14:section name="Meter" id="{d49ab6d5-1f81-4329-589d-1ed66aa6394f}">
+        <p14:section name="Meter" id="{c4d0fa15-a723-f4ab-8aba-987918af1c88}">
           <p14:sldIdLst>
             <p14:sldId id="276"/>
             <p14:sldId id="277"/>
             <p14:sldId id="278"/>
           </p14:sldIdLst>
         </p14:section>
-        <p14:section name="Close" id="{cb4016d9-4d5b-d2aa-49fe-0c4d7e311b59}">
+        <p14:section name="Close" id="{a3da5092-9896-a481-1cea-d591409ba33d}">
           <p14:sldIdLst>
             <p14:sldId id="279"/>
             <p14:sldId id="280"/>
@@ -25628,7 +25628,7 @@
                   <a:srgbClr val="0B3D2E"/>
                 </a:solidFill>
               </a:rPr>
-              <a:t>Wire it: a microphone, and the Lesson 3 LEDs</a:t>
+              <a:t>Wire it: microphone + Lesson 3 LEDs</a:t>
             </a:r>
             <a:endParaRPr lang="en-US" sz="3000" dirty="0"/>
           </a:p>
@@ -25813,7 +25813,7 @@
                   <a:srgbClr val="FFFFFF"/>
                 </a:solidFill>
               </a:rPr>
-              <a:t>GPIO36</a:t>
+              <a:t>SENSOR VP</a:t>
             </a:r>
             <a:endParaRPr lang="en-US" sz="1100" dirty="0"/>
           </a:p>
@@ -28831,7 +28831,7 @@
                   <a:srgbClr val="9A6B00"/>
                 </a:solidFill>
               </a:rPr>
-              <a:t>GPIO36 only.
+              <a:t>Only these pins today.
 </a:t>
             </a:r>
             <a:pPr indent="0" marL="0">
@@ -28843,7 +28843,7 @@
                   <a:srgbClr val="1B1B1B"/>
                 </a:solidFill>
               </a:rPr>
-              <a:t>GPIO25, 26 and 27 stop reading once Wi-Fi starts. 36 keeps working.</a:t>
+              <a:t>Leave the ultrasonic sensor, the buzzer and the servo in the box.</a:t>
             </a:r>
             <a:endParaRPr lang="en-US" sz="1200" dirty="0"/>
           </a:p>
@@ -28865,8 +28865,8 @@
         </p:blipFill>
         <p:spPr>
           <a:xfrm>
-            <a:off x="6035040" y="3429000"/>
-            <a:ext cx="877824" cy="1234440"/>
+            <a:off x="6035040" y="3291840"/>
+            <a:ext cx="941832" cy="1325880"/>
           </a:xfrm>
           <a:prstGeom prst="rect">
             <a:avLst/>
@@ -28881,8 +28881,8 @@
         </p:nvSpPr>
         <p:spPr>
           <a:xfrm>
-            <a:off x="7040880" y="3429000"/>
-            <a:ext cx="1691640" cy="1234440"/>
+            <a:off x="7086600" y="3383280"/>
+            <a:ext cx="1645920" cy="1097280"/>
           </a:xfrm>
           <a:prstGeom prst="rect">
             <a:avLst/>
@@ -28898,7 +28898,7 @@
               <a:buNone/>
             </a:pPr>
             <a:r>
-              <a:rPr lang="en-US" sz="1100" b="1" dirty="0">
+              <a:rPr lang="en-US" sz="1200" b="1" dirty="0">
                 <a:solidFill>
                   <a:srgbClr val="0B3D2E"/>
                 </a:solidFill>
@@ -28912,42 +28912,28 @@
               <a:buNone/>
             </a:pPr>
             <a:r>
-              <a:rPr lang="en-US" sz="1100" dirty="0">
+              <a:rPr lang="en-US" sz="1200" dirty="0">
                 <a:solidFill>
                   <a:srgbClr val="0B3D2E"/>
                 </a:solidFill>
               </a:rPr>
-              <a:t> in that order.</a:t>
-            </a:r>
-            <a:endParaRPr lang="en-US" sz="1100" dirty="0"/>
-          </a:p>
-          <a:p>
-            <a:pPr indent="0" marL="0">
-              <a:buNone/>
-            </a:pPr>
-            <a:r>
-              <a:rPr lang="en-US" sz="1100" dirty="0">
+              <a:t> in that order on the module.</a:t>
+            </a:r>
+            <a:endParaRPr lang="en-US" sz="1200" dirty="0"/>
+          </a:p>
+          <a:p>
+            <a:pPr indent="0" marL="0">
+              <a:buNone/>
+            </a:pPr>
+            <a:r>
+              <a:rPr lang="en-US" sz="1200" dirty="0">
                 <a:solidFill>
                   <a:srgbClr val="0B3D2E"/>
                 </a:solidFill>
               </a:rPr>
-              <a:t>V to 3V3, never 5V: GPIO36 must not see more than 3.3 V.</a:t>
-            </a:r>
-            <a:endParaRPr lang="en-US" sz="1100" dirty="0"/>
-          </a:p>
-          <a:p>
-            <a:pPr indent="0" marL="0">
-              <a:buNone/>
-            </a:pPr>
-            <a:r>
-              <a:rPr lang="en-US" sz="1100" dirty="0">
-                <a:solidFill>
-                  <a:srgbClr val="0B3D2E"/>
-                </a:solidFill>
-              </a:rPr>
-              <a:t>A quiet room sits near 0. Sound shows as spikes upward.</a:t>
-            </a:r>
-            <a:endParaRPr lang="en-US" sz="1100" dirty="0"/>
+              <a:t>SENSOR VP is the pin under EN.</a:t>
+            </a:r>
+            <a:endParaRPr lang="en-US" sz="1200" dirty="0"/>
           </a:p>
         </p:txBody>
       </p:sp>
@@ -29271,7 +29257,7 @@
               <a:buNone/>
             </a:pPr>
             <a:r>
-              <a:rPr lang="en-US" sz="900" dirty="0">
+              <a:rPr lang="en-US" sz="1000" dirty="0">
                 <a:solidFill>
                   <a:srgbClr val="6F8A7F"/>
                 </a:solidFill>
@@ -29285,7 +29271,7 @@
               <a:buNone/>
             </a:pPr>
             <a:r>
-              <a:rPr lang="en-US" sz="900" dirty="0">
+              <a:rPr lang="en-US" sz="1000" dirty="0">
                 <a:solidFill>
                   <a:srgbClr val="E6F2EC"/>
                 </a:solidFill>
@@ -29293,16 +29279,16 @@
                 <a:ea typeface="Courier New" pitchFamily="34" charset="-122"/>
                 <a:cs typeface="Courier New" pitchFamily="34" charset="-120"/>
               </a:rPr>
-              <a:t>mic = ADC(Pin(36))</a:t>
-            </a:r>
-            <a:endParaRPr lang="en-US" sz="900" dirty="0"/>
-          </a:p>
-          <a:p>
-            <a:pPr indent="0" marL="0">
-              <a:buNone/>
-            </a:pPr>
-            <a:r>
-              <a:rPr lang="en-US" sz="900" dirty="0">
+              <a:t>mic.width(ADC.WIDTH_12BIT)    # answer as 0 to 4095</a:t>
+            </a:r>
+            <a:endParaRPr lang="en-US" sz="1000" dirty="0"/>
+          </a:p>
+          <a:p>
+            <a:pPr indent="0" marL="0">
+              <a:buNone/>
+            </a:pPr>
+            <a:r>
+              <a:rPr lang="en-US" sz="1000" dirty="0">
                 <a:solidFill>
                   <a:srgbClr val="6F8A7F"/>
                 </a:solidFill>
@@ -29316,7 +29302,7 @@
               <a:buNone/>
             </a:pPr>
             <a:r>
-              <a:rPr lang="en-US" sz="900" dirty="0">
+              <a:rPr lang="en-US" sz="1000" dirty="0">
                 <a:solidFill>
                   <a:srgbClr val="E6F2EC"/>
                 </a:solidFill>
@@ -29324,16 +29310,16 @@
                 <a:ea typeface="Courier New" pitchFamily="34" charset="-122"/>
                 <a:cs typeface="Courier New" pitchFamily="34" charset="-120"/>
               </a:rPr>
-              <a:t>mic.atten(ADC.ATTN_11DB)      # read the full 0 to 3.3 V</a:t>
-            </a:r>
-            <a:endParaRPr lang="en-US" sz="900" dirty="0"/>
-          </a:p>
-          <a:p>
-            <a:pPr indent="0" marL="0">
-              <a:buNone/>
-            </a:pPr>
-            <a:r>
-              <a:rPr lang="en-US" sz="900" dirty="0">
+              <a:t> </a:t>
+            </a:r>
+            <a:endParaRPr lang="en-US" sz="1000" dirty="0"/>
+          </a:p>
+          <a:p>
+            <a:pPr indent="0" marL="0">
+              <a:buNone/>
+            </a:pPr>
+            <a:r>
+              <a:rPr lang="en-US" sz="1000" dirty="0">
                 <a:solidFill>
                   <a:srgbClr val="6F8A7F"/>
                 </a:solidFill>
@@ -29347,7 +29333,7 @@
               <a:buNone/>
             </a:pPr>
             <a:r>
-              <a:rPr lang="en-US" sz="900" dirty="0">
+              <a:rPr lang="en-US" sz="1000" dirty="0">
                 <a:solidFill>
                   <a:srgbClr val="E6F2EC"/>
                 </a:solidFill>
@@ -29355,16 +29341,16 @@
                 <a:ea typeface="Courier New" pitchFamily="34" charset="-122"/>
                 <a:cs typeface="Courier New" pitchFamily="34" charset="-120"/>
               </a:rPr>
-              <a:t>mic.width(ADC.WIDTH_12BIT)    # answer as 0 to 4095</a:t>
-            </a:r>
-            <a:endParaRPr lang="en-US" sz="900" dirty="0"/>
-          </a:p>
-          <a:p>
-            <a:pPr indent="0" marL="0">
-              <a:buNone/>
-            </a:pPr>
-            <a:r>
-              <a:rPr lang="en-US" sz="900" dirty="0">
+              <a:t>try:</a:t>
+            </a:r>
+            <a:endParaRPr lang="en-US" sz="1000" dirty="0"/>
+          </a:p>
+          <a:p>
+            <a:pPr indent="0" marL="0">
+              <a:buNone/>
+            </a:pPr>
+            <a:r>
+              <a:rPr lang="en-US" sz="1000" dirty="0">
                 <a:solidFill>
                   <a:srgbClr val="6F8A7F"/>
                 </a:solidFill>
@@ -29374,14 +29360,14 @@
               </a:rPr>
               <a:t>   ⋮</a:t>
             </a:r>
-            <a:endParaRPr lang="en-US" sz="900" dirty="0"/>
-          </a:p>
-          <a:p>
-            <a:pPr indent="0" marL="0">
-              <a:buNone/>
-            </a:pPr>
-            <a:r>
-              <a:rPr lang="en-US" sz="900" dirty="0">
+            <a:endParaRPr lang="en-US" sz="1000" dirty="0"/>
+          </a:p>
+          <a:p>
+            <a:pPr indent="0" marL="0">
+              <a:buNone/>
+            </a:pPr>
+            <a:r>
+              <a:rPr lang="en-US" sz="1000" dirty="0">
                 <a:solidFill>
                   <a:srgbClr val="6F8A7F"/>
                 </a:solidFill>
@@ -29395,7 +29381,7 @@
               <a:buNone/>
             </a:pPr>
             <a:r>
-              <a:rPr lang="en-US" sz="900" dirty="0">
+              <a:rPr lang="en-US" sz="1000" dirty="0">
                 <a:solidFill>
                   <a:srgbClr val="E6F2EC"/>
                 </a:solidFill>
@@ -29403,16 +29389,16 @@
                 <a:ea typeface="Courier New" pitchFamily="34" charset="-122"/>
                 <a:cs typeface="Courier New" pitchFamily="34" charset="-120"/>
               </a:rPr>
-              <a:t>    while True:</a:t>
-            </a:r>
-            <a:endParaRPr lang="en-US" sz="900" dirty="0"/>
-          </a:p>
-          <a:p>
-            <a:pPr indent="0" marL="0">
-              <a:buNone/>
-            </a:pPr>
-            <a:r>
-              <a:rPr lang="en-US" sz="900" dirty="0">
+              <a:t>        print(value)</a:t>
+            </a:r>
+            <a:endParaRPr lang="en-US" sz="1000" dirty="0"/>
+          </a:p>
+          <a:p>
+            <a:pPr indent="0" marL="0">
+              <a:buNone/>
+            </a:pPr>
+            <a:r>
+              <a:rPr lang="en-US" sz="1000" dirty="0">
                 <a:solidFill>
                   <a:srgbClr val="6F8A7F"/>
                 </a:solidFill>
@@ -29426,7 +29412,7 @@
               <a:buNone/>
             </a:pPr>
             <a:r>
-              <a:rPr lang="en-US" sz="900" dirty="0">
+              <a:rPr lang="en-US" sz="1000" dirty="0">
                 <a:solidFill>
                   <a:srgbClr val="E6F2EC"/>
                 </a:solidFill>
@@ -29434,16 +29420,16 @@
                 <a:ea typeface="Courier New" pitchFamily="34" charset="-122"/>
                 <a:cs typeface="Courier New" pitchFamily="34" charset="-120"/>
               </a:rPr>
-              <a:t>        value = mic.read()</a:t>
-            </a:r>
-            <a:endParaRPr lang="en-US" sz="900" dirty="0"/>
-          </a:p>
-          <a:p>
-            <a:pPr indent="0" marL="0">
-              <a:buNone/>
-            </a:pPr>
-            <a:r>
-              <a:rPr lang="en-US" sz="900" dirty="0">
+              <a:t>        time.sleep(0.2)</a:t>
+            </a:r>
+            <a:endParaRPr lang="en-US" sz="1000" dirty="0"/>
+          </a:p>
+          <a:p>
+            <a:pPr indent="0" marL="0">
+              <a:buNone/>
+            </a:pPr>
+            <a:r>
+              <a:rPr lang="en-US" sz="1000" dirty="0">
                 <a:solidFill>
                   <a:srgbClr val="6F8A7F"/>
                 </a:solidFill>
@@ -29457,7 +29443,7 @@
               <a:buNone/>
             </a:pPr>
             <a:r>
-              <a:rPr lang="en-US" sz="900" dirty="0">
+              <a:rPr lang="en-US" sz="1000" dirty="0">
                 <a:solidFill>
                   <a:srgbClr val="E6F2EC"/>
                 </a:solidFill>
@@ -29465,16 +29451,16 @@
                 <a:ea typeface="Courier New" pitchFamily="34" charset="-122"/>
                 <a:cs typeface="Courier New" pitchFamily="34" charset="-120"/>
               </a:rPr>
-              <a:t>        print(value)</a:t>
-            </a:r>
-            <a:endParaRPr lang="en-US" sz="900" dirty="0"/>
-          </a:p>
-          <a:p>
-            <a:pPr indent="0" marL="0">
-              <a:buNone/>
-            </a:pPr>
-            <a:r>
-              <a:rPr lang="en-US" sz="900" dirty="0">
+              <a:t> </a:t>
+            </a:r>
+            <a:endParaRPr lang="en-US" sz="1000" dirty="0"/>
+          </a:p>
+          <a:p>
+            <a:pPr indent="0" marL="0">
+              <a:buNone/>
+            </a:pPr>
+            <a:r>
+              <a:rPr lang="en-US" sz="1000" dirty="0">
                 <a:solidFill>
                   <a:srgbClr val="6F8A7F"/>
                 </a:solidFill>
@@ -29488,7 +29474,7 @@
               <a:buNone/>
             </a:pPr>
             <a:r>
-              <a:rPr lang="en-US" sz="900" dirty="0">
+              <a:rPr lang="en-US" sz="1000" dirty="0">
                 <a:solidFill>
                   <a:srgbClr val="E6F2EC"/>
                 </a:solidFill>
@@ -29496,9 +29482,9 @@
                 <a:ea typeface="Courier New" pitchFamily="34" charset="-122"/>
                 <a:cs typeface="Courier New" pitchFamily="34" charset="-120"/>
               </a:rPr>
-              <a:t>        time.sleep(0.2)</a:t>
-            </a:r>
-            <a:endParaRPr lang="en-US" sz="900" dirty="0"/>
+              <a:t>finally:</a:t>
+            </a:r>
+            <a:endParaRPr lang="en-US" sz="1000" dirty="0"/>
           </a:p>
         </p:txBody>
       </p:sp>
@@ -29644,7 +29630,7 @@
                   <a:srgbClr val="1B1B1B"/>
                 </a:solidFill>
               </a:rPr>
-              <a:t>Always 0? Check the S wire goes to GPIO36.</a:t>
+              <a:t>Always 0? S is on SENSOR VP, the pin under EN.</a:t>
             </a:r>
             <a:endParaRPr lang="en-US" sz="1400" dirty="0"/>
           </a:p>
